--- a/docs/10. update-2026-05-28.pptx
+++ b/docs/10. update-2026-05-28.pptx
@@ -3169,7 +3169,7 @@
               </a:defRPr>
             </a:pPr>
             <a:r>
-              <a:t>Minor Payroll Fixes from Running May Service Fee — 2026.05.28</a:t>
+              <a:t>Payroll Fixes + Benchmark Idea — 2026.05.28</a:t>
             </a:r>
           </a:p>
         </p:txBody>
@@ -3204,7 +3204,7 @@
               </a:defRPr>
             </a:pPr>
             <a:r>
-              <a:t>Bulk Operations  |  Expense Recalculation  |  USD Totals  |  Inline Editing</a:t>
+              <a:t>May Service Fee fixes  |  Org Benchmark for Candidate Evaluation</a:t>
             </a:r>
           </a:p>
         </p:txBody>
@@ -3265,7 +3265,7 @@
               </a:defRPr>
             </a:pPr>
             <a:r>
-              <a:t>Last Week Recap (May 20)</a:t>
+              <a:t>Last Week + This Week</a:t>
             </a:r>
           </a:p>
         </p:txBody>
@@ -3300,7 +3300,7 @@
               </a:defRPr>
             </a:pPr>
             <a:r>
-              <a:t>What Was Delivered</a:t>
+              <a:t>Last Week</a:t>
             </a:r>
           </a:p>
           <a:p>
@@ -3315,7 +3315,7 @@
               </a:defRPr>
             </a:pPr>
             <a:r>
-              <a:t>  -  Candidate Pipeline — full lifecycle with evaluation compensation</a:t>
+              <a:t>  -  Candidate Pipeline — full lifecycle</a:t>
             </a:r>
           </a:p>
           <a:p>
@@ -3330,7 +3330,7 @@
               </a:defRPr>
             </a:pPr>
             <a:r>
-              <a:t>  -  Invoice Module — AI-powered PDF parsing (AR/AP)</a:t>
+              <a:t>  -  Invoice Module — AI PDF parsing</a:t>
             </a:r>
           </a:p>
           <a:p>
@@ -3345,22 +3345,7 @@
               </a:defRPr>
             </a:pPr>
             <a:r>
-              <a:t>  -  Document Repository — 6 years of Singapore filings</a:t>
-            </a:r>
-          </a:p>
-          <a:p>
-            <a:pPr>
-              <a:spcBef>
-                <a:spcPts val="1000"/>
-              </a:spcBef>
-              <a:defRPr sz="1600" b="0">
-                <a:solidFill>
-                  <a:srgbClr val="CCCCCC"/>
-                </a:solidFill>
-              </a:defRPr>
-            </a:pPr>
-            <a:r>
-              <a:t>  -  Cloud Migration — Supabase + Railway live</a:t>
+              <a:t>  -  Document Repository — 6 years of filings</a:t>
             </a:r>
           </a:p>
         </p:txBody>
@@ -3374,7 +3359,7 @@
         <p:spPr>
           <a:xfrm>
             <a:off x="6400800" y="1828800"/>
-            <a:ext cx="4572000" cy="1828800"/>
+            <a:ext cx="4572000" cy="2743200"/>
           </a:xfrm>
           <a:prstGeom prst="rect">
             <a:avLst/>
@@ -3395,7 +3380,7 @@
               </a:defRPr>
             </a:pPr>
             <a:r>
-              <a:t>This Week: Fixes from Real Usage</a:t>
+              <a:t>This Week</a:t>
             </a:r>
           </a:p>
           <a:p>
@@ -3410,30 +3395,64 @@
               </a:defRPr>
             </a:pPr>
             <a:r>
-              <a:t>Processed May Service Fee for all 6 members</a:t>
-            </a:r>
-            <a:br/>
-            <a:r>
-              <a:t>end-to-end for the first time — fixed the</a:t>
-            </a:r>
-            <a:br/>
-            <a:r>
-              <a:t>friction points discovered along the way</a:t>
-            </a:r>
-          </a:p>
-          <a:p>
-            <a:pPr>
-              <a:spcBef>
-                <a:spcPts val="2000"/>
-              </a:spcBef>
-              <a:defRPr sz="1800" b="1">
+              <a:t>Ran May Service Fee end-to-end</a:t>
+            </a:r>
+          </a:p>
+          <a:p>
+            <a:pPr>
+              <a:spcBef>
+                <a:spcPts val="400"/>
+              </a:spcBef>
+              <a:defRPr sz="1600" b="0">
+                <a:solidFill>
+                  <a:srgbClr val="CCCCCC"/>
+                </a:solidFill>
+              </a:defRPr>
+            </a:pPr>
+            <a:r>
+              <a:t>for all 6 members — first real run</a:t>
+            </a:r>
+          </a:p>
+          <a:p>
+            <a:pPr>
+              <a:spcBef>
+                <a:spcPts val="600"/>
+              </a:spcBef>
+              <a:defRPr sz="800" b="0">
+                <a:solidFill>
+                  <a:srgbClr val="999999"/>
+                </a:solidFill>
+              </a:defRPr>
+            </a:pPr>
+          </a:p>
+          <a:p>
+            <a:pPr>
+              <a:spcBef>
+                <a:spcPts val="1000"/>
+              </a:spcBef>
+              <a:defRPr sz="1600" b="0">
+                <a:solidFill>
+                  <a:srgbClr val="CCCCCC"/>
+                </a:solidFill>
+              </a:defRPr>
+            </a:pPr>
+            <a:r>
+              <a:t>Fixed small issues found along the way</a:t>
+            </a:r>
+          </a:p>
+          <a:p>
+            <a:pPr>
+              <a:spcBef>
+                <a:spcPts val="1000"/>
+              </a:spcBef>
+              <a:defRPr sz="1600" b="1">
                 <a:solidFill>
                   <a:srgbClr val="F59E0B"/>
                 </a:solidFill>
               </a:defRPr>
             </a:pPr>
             <a:r>
-              <a:t>4 minor but practical fixes</a:t>
+              <a:t>+ one new idea for evaluation</a:t>
             </a:r>
           </a:p>
         </p:txBody>
@@ -3494,7 +3513,7 @@
               </a:defRPr>
             </a:pPr>
             <a:r>
-              <a:t>Update 1 — Payroll Bulk Selection &amp; Delete</a:t>
+              <a:t>Fix 1 — Bulk Delete</a:t>
             </a:r>
           </a:p>
         </p:txBody>
@@ -3508,7 +3527,7 @@
         <p:spPr>
           <a:xfrm>
             <a:off x="914400" y="1828800"/>
-            <a:ext cx="5029200" cy="3657600"/>
+            <a:ext cx="5029200" cy="2743200"/>
           </a:xfrm>
           <a:prstGeom prst="rect">
             <a:avLst/>
@@ -3524,12 +3543,12 @@
             <a:pPr algn="l">
               <a:defRPr sz="2000" b="1">
                 <a:solidFill>
-                  <a:srgbClr val="2A72E5"/>
-                </a:solidFill>
-              </a:defRPr>
-            </a:pPr>
-            <a:r>
-              <a:t>New Features</a:t>
+                  <a:srgbClr val="999999"/>
+                </a:solidFill>
+              </a:defRPr>
+            </a:pPr>
+            <a:r>
+              <a:t>Before</a:t>
             </a:r>
           </a:p>
           <a:p>
@@ -3539,18 +3558,75 @@
               </a:spcBef>
               <a:defRPr sz="1600" b="0">
                 <a:solidFill>
+                  <a:srgbClr val="999999"/>
+                </a:solidFill>
+              </a:defRPr>
+            </a:pPr>
+            <a:r>
+              <a:t>Delete one by one</a:t>
+            </a:r>
+          </a:p>
+          <a:p>
+            <a:pPr>
+              <a:spcBef>
+                <a:spcPts val="600"/>
+              </a:spcBef>
+              <a:defRPr sz="1600" b="0">
+                <a:solidFill>
+                  <a:srgbClr val="999999"/>
+                </a:solidFill>
+              </a:defRPr>
+            </a:pPr>
+            <a:r>
+              <a:t>6 members = 6 clicks + 6 confirmations</a:t>
+            </a:r>
+          </a:p>
+          <a:p>
+            <a:pPr>
+              <a:spcBef>
+                <a:spcPts val="600"/>
+              </a:spcBef>
+              <a:defRPr sz="1200" b="0">
+                <a:solidFill>
+                  <a:srgbClr val="999999"/>
+                </a:solidFill>
+              </a:defRPr>
+            </a:pPr>
+          </a:p>
+          <a:p>
+            <a:pPr>
+              <a:spcBef>
+                <a:spcPts val="2000"/>
+              </a:spcBef>
+              <a:defRPr sz="2000" b="1">
+                <a:solidFill>
+                  <a:srgbClr val="10B981"/>
+                </a:solidFill>
+              </a:defRPr>
+            </a:pPr>
+            <a:r>
+              <a:t>After</a:t>
+            </a:r>
+          </a:p>
+          <a:p>
+            <a:pPr>
+              <a:spcBef>
+                <a:spcPts val="1000"/>
+              </a:spcBef>
+              <a:defRPr sz="1600" b="0">
+                <a:solidFill>
                   <a:srgbClr val="CCCCCC"/>
                 </a:solidFill>
               </a:defRPr>
             </a:pPr>
             <a:r>
-              <a:t>  -  Checkbox on every payroll row</a:t>
-            </a:r>
-          </a:p>
-          <a:p>
-            <a:pPr>
-              <a:spcBef>
-                <a:spcPts val="1000"/>
+              <a:t>Checkbox on each row</a:t>
+            </a:r>
+          </a:p>
+          <a:p>
+            <a:pPr>
+              <a:spcBef>
+                <a:spcPts val="600"/>
               </a:spcBef>
               <a:defRPr sz="1600" b="0">
                 <a:solidFill>
@@ -3559,13 +3635,13 @@
               </a:defRPr>
             </a:pPr>
             <a:r>
-              <a:t>  -  Header checkbox for "Select All / Deselect All"</a:t>
-            </a:r>
-          </a:p>
-          <a:p>
-            <a:pPr>
-              <a:spcBef>
-                <a:spcPts val="1000"/>
+              <a:t>Select all or pick specific ones</a:t>
+            </a:r>
+          </a:p>
+          <a:p>
+            <a:pPr>
+              <a:spcBef>
+                <a:spcPts val="600"/>
               </a:spcBef>
               <a:defRPr sz="1600" b="0">
                 <a:solidFill>
@@ -3574,137 +3650,7 @@
               </a:defRPr>
             </a:pPr>
             <a:r>
-              <a:t>  -  Action bar: shows count + bulk delete button</a:t>
-            </a:r>
-          </a:p>
-          <a:p>
-            <a:pPr>
-              <a:spcBef>
-                <a:spcPts val="1000"/>
-              </a:spcBef>
-              <a:defRPr sz="1600" b="0">
-                <a:solidFill>
-                  <a:srgbClr val="CCCCCC"/>
-                </a:solidFill>
-              </a:defRPr>
-            </a:pPr>
-            <a:r>
-              <a:t>  -  Confirmation dialog before bulk deletion</a:t>
-            </a:r>
-          </a:p>
-          <a:p>
-            <a:pPr>
-              <a:spcBef>
-                <a:spcPts val="1000"/>
-              </a:spcBef>
-              <a:defRPr sz="1600" b="0">
-                <a:solidFill>
-                  <a:srgbClr val="CCCCCC"/>
-                </a:solidFill>
-              </a:defRPr>
-            </a:pPr>
-            <a:r>
-              <a:t>  -  Selection clears on month/year change</a:t>
-            </a:r>
-          </a:p>
-        </p:txBody>
-      </p:sp>
-      <p:sp>
-        <p:nvSpPr>
-          <p:cNvPr id="4" name="TextBox 3"/>
-          <p:cNvSpPr txBox="1"/>
-          <p:nvPr/>
-        </p:nvSpPr>
-        <p:spPr>
-          <a:xfrm>
-            <a:off x="6400800" y="1828800"/>
-            <a:ext cx="4572000" cy="2743200"/>
-          </a:xfrm>
-          <a:prstGeom prst="rect">
-            <a:avLst/>
-          </a:prstGeom>
-          <a:noFill/>
-        </p:spPr>
-        <p:txBody>
-          <a:bodyPr wrap="square">
-            <a:spAutoFit/>
-          </a:bodyPr>
-          <a:lstStyle/>
-          <a:p>
-            <a:pPr algn="l">
-              <a:defRPr sz="1800" b="1">
-                <a:solidFill>
-                  <a:srgbClr val="999999"/>
-                </a:solidFill>
-              </a:defRPr>
-            </a:pPr>
-            <a:r>
-              <a:t>Before</a:t>
-            </a:r>
-          </a:p>
-          <a:p>
-            <a:pPr>
-              <a:spcBef>
-                <a:spcPts val="800"/>
-              </a:spcBef>
-              <a:defRPr sz="1500" b="0">
-                <a:solidFill>
-                  <a:srgbClr val="999999"/>
-                </a:solidFill>
-              </a:defRPr>
-            </a:pPr>
-            <a:r>
-              <a:t>Delete one record at a time</a:t>
-            </a:r>
-            <a:br/>
-            <a:r>
-              <a:t>6 team members = 6 clicks + 6 confirmations</a:t>
-            </a:r>
-          </a:p>
-          <a:p>
-            <a:pPr>
-              <a:spcBef>
-                <a:spcPts val="600"/>
-              </a:spcBef>
-              <a:defRPr sz="1000" b="0">
-                <a:solidFill>
-                  <a:srgbClr val="999999"/>
-                </a:solidFill>
-              </a:defRPr>
-            </a:pPr>
-          </a:p>
-          <a:p>
-            <a:pPr>
-              <a:spcBef>
-                <a:spcPts val="1600"/>
-              </a:spcBef>
-              <a:defRPr sz="1800" b="1">
-                <a:solidFill>
-                  <a:srgbClr val="10B981"/>
-                </a:solidFill>
-              </a:defRPr>
-            </a:pPr>
-            <a:r>
-              <a:t>After</a:t>
-            </a:r>
-          </a:p>
-          <a:p>
-            <a:pPr>
-              <a:spcBef>
-                <a:spcPts val="800"/>
-              </a:spcBef>
-              <a:defRPr sz="1500" b="0">
-                <a:solidFill>
-                  <a:srgbClr val="CCCCCC"/>
-                </a:solidFill>
-              </a:defRPr>
-            </a:pPr>
-            <a:r>
-              <a:t>Select all → one click → done</a:t>
-            </a:r>
-            <a:br/>
-            <a:r>
-              <a:t>Also sets up future bulk operations</a:t>
+              <a:t>Delete at once</a:t>
             </a:r>
           </a:p>
         </p:txBody>
@@ -3765,7 +3711,7 @@
               </a:defRPr>
             </a:pPr>
             <a:r>
-              <a:t>Update 2 — Expense-Inclusive Recalculation</a:t>
+              <a:t>Fix 2 — Expense Recalculation</a:t>
             </a:r>
           </a:p>
         </p:txBody>
@@ -3815,113 +3761,94 @@
               </a:defRPr>
             </a:pPr>
             <a:r>
-              <a:t>Net pay was calculated on Service Fee only</a:t>
-            </a:r>
-          </a:p>
-          <a:p>
-            <a:pPr>
-              <a:spcBef>
-                <a:spcPts val="800"/>
-              </a:spcBef>
-              <a:defRPr sz="1600" b="0">
+              <a:t>Net pay didn't include expenses</a:t>
+            </a:r>
+          </a:p>
+          <a:p>
+            <a:pPr>
+              <a:spcBef>
+                <a:spcPts val="600"/>
+              </a:spcBef>
+              <a:defRPr sz="800" b="0">
+                <a:solidFill>
+                  <a:srgbClr val="999999"/>
+                </a:solidFill>
+              </a:defRPr>
+            </a:pPr>
+          </a:p>
+          <a:p>
+            <a:pPr>
+              <a:spcBef>
+                <a:spcPts val="1000"/>
+              </a:spcBef>
+              <a:defRPr sz="1600" b="1">
+                <a:solidFill>
+                  <a:srgbClr val="FFFFFF"/>
+                </a:solidFill>
+              </a:defRPr>
+            </a:pPr>
+            <a:r>
+              <a:t>Example: Jaden</a:t>
+            </a:r>
+          </a:p>
+          <a:p>
+            <a:pPr>
+              <a:spcBef>
+                <a:spcPts val="600"/>
+              </a:spcBef>
+              <a:defRPr sz="1500" b="0">
                 <a:solidFill>
                   <a:srgbClr val="CCCCCC"/>
                 </a:solidFill>
               </a:defRPr>
             </a:pPr>
             <a:r>
-              <a:t>Expenses appeared in 'Total' column but</a:t>
-            </a:r>
-            <a:br/>
-            <a:r>
-              <a:t>were NOT reflected in the payout amount</a:t>
-            </a:r>
-          </a:p>
-          <a:p>
-            <a:pPr>
-              <a:spcBef>
-                <a:spcPts val="600"/>
-              </a:spcBef>
-              <a:defRPr sz="800" b="0">
+              <a:t>  Service Fee: 1,950 USDT</a:t>
+            </a:r>
+          </a:p>
+          <a:p>
+            <a:pPr>
+              <a:spcBef>
+                <a:spcPts val="400"/>
+              </a:spcBef>
+              <a:defRPr sz="1500" b="0">
+                <a:solidFill>
+                  <a:srgbClr val="CCCCCC"/>
+                </a:solidFill>
+              </a:defRPr>
+            </a:pPr>
+            <a:r>
+              <a:t>  Expense: 710 USDT</a:t>
+            </a:r>
+          </a:p>
+          <a:p>
+            <a:pPr>
+              <a:spcBef>
+                <a:spcPts val="400"/>
+              </a:spcBef>
+              <a:defRPr sz="1500" b="0">
                 <a:solidFill>
                   <a:srgbClr val="999999"/>
                 </a:solidFill>
               </a:defRPr>
             </a:pPr>
-          </a:p>
-          <a:p>
-            <a:pPr>
-              <a:spcBef>
-                <a:spcPts val="1400"/>
-              </a:spcBef>
-              <a:defRPr sz="1800" b="1">
-                <a:solidFill>
-                  <a:srgbClr val="FFFFFF"/>
-                </a:solidFill>
-              </a:defRPr>
-            </a:pPr>
-            <a:r>
-              <a:t>Example: Jaden</a:t>
-            </a:r>
-          </a:p>
-          <a:p>
-            <a:pPr>
-              <a:spcBef>
-                <a:spcPts val="600"/>
+            <a:r>
+              <a:t>  Old: net pay based on 1,950 only</a:t>
+            </a:r>
+          </a:p>
+          <a:p>
+            <a:pPr>
+              <a:spcBef>
+                <a:spcPts val="400"/>
               </a:spcBef>
               <a:defRPr sz="1500" b="0">
                 <a:solidFill>
-                  <a:srgbClr val="CCCCCC"/>
-                </a:solidFill>
-              </a:defRPr>
-            </a:pPr>
-            <a:r>
-              <a:t>  Service Fee: 1,950 USDT</a:t>
-            </a:r>
-          </a:p>
-          <a:p>
-            <a:pPr>
-              <a:spcBef>
-                <a:spcPts val="400"/>
-              </a:spcBef>
-              <a:defRPr sz="1500" b="0">
-                <a:solidFill>
-                  <a:srgbClr val="CCCCCC"/>
-                </a:solidFill>
-              </a:defRPr>
-            </a:pPr>
-            <a:r>
-              <a:t>  Expense: 710 USDT</a:t>
-            </a:r>
-          </a:p>
-          <a:p>
-            <a:pPr>
-              <a:spcBef>
-                <a:spcPts val="400"/>
-              </a:spcBef>
-              <a:defRPr sz="1500" b="0">
-                <a:solidFill>
-                  <a:srgbClr val="999999"/>
-                </a:solidFill>
-              </a:defRPr>
-            </a:pPr>
-            <a:r>
-              <a:t>  Old net pay: based on 1,950 only</a:t>
-            </a:r>
-          </a:p>
-          <a:p>
-            <a:pPr>
-              <a:spcBef>
-                <a:spcPts val="400"/>
-              </a:spcBef>
-              <a:defRPr sz="1500" b="0">
-                <a:solidFill>
                   <a:srgbClr val="10B981"/>
                 </a:solidFill>
               </a:defRPr>
             </a:pPr>
             <a:r>
-              <a:t>  New net pay: based on 2,660 (fee + expense)</a:t>
+              <a:t>  New: based on 2,660 (fee + expense)</a:t>
             </a:r>
           </a:p>
         </p:txBody>
@@ -3935,7 +3862,7 @@
         <p:spPr>
           <a:xfrm>
             <a:off x="6400800" y="1828800"/>
-            <a:ext cx="4572000" cy="3657600"/>
+            <a:ext cx="4572000" cy="2743200"/>
           </a:xfrm>
           <a:prstGeom prst="rect">
             <a:avLst/>
@@ -3971,7 +3898,7 @@
               </a:defRPr>
             </a:pPr>
             <a:r>
-              <a:t>"Recalculate" button added to payroll toolbar</a:t>
+              <a:t>"Recalculate" button</a:t>
             </a:r>
           </a:p>
           <a:p>
@@ -3991,21 +3918,6 @@
               <a:spcBef>
                 <a:spcPts val="1000"/>
               </a:spcBef>
-              <a:defRPr sz="1600" b="1">
-                <a:solidFill>
-                  <a:srgbClr val="FFFFFF"/>
-                </a:solidFill>
-              </a:defRPr>
-            </a:pPr>
-            <a:r>
-              <a:t>How it works:</a:t>
-            </a:r>
-          </a:p>
-          <a:p>
-            <a:pPr>
-              <a:spcBef>
-                <a:spcPts val="800"/>
-              </a:spcBef>
               <a:defRPr sz="1500" b="0">
                 <a:solidFill>
                   <a:srgbClr val="CCCCCC"/>
@@ -4013,13 +3925,13 @@
               </a:defRPr>
             </a:pPr>
             <a:r>
-              <a:t>  1. Pulls latest expense data per member</a:t>
-            </a:r>
-          </a:p>
-          <a:p>
-            <a:pPr>
-              <a:spcBef>
-                <a:spcPts val="400"/>
+              <a:t>Total = Service Fee + Expense</a:t>
+            </a:r>
+          </a:p>
+          <a:p>
+            <a:pPr>
+              <a:spcBef>
+                <a:spcPts val="600"/>
               </a:spcBef>
               <a:defRPr sz="1500" b="0">
                 <a:solidFill>
@@ -4028,13 +3940,13 @@
               </a:defRPr>
             </a:pPr>
             <a:r>
-              <a:t>  2. Total = Service Fee + Expenses</a:t>
-            </a:r>
-          </a:p>
-          <a:p>
-            <a:pPr>
-              <a:spcBef>
-                <a:spcPts val="400"/>
+              <a:t>Tax = Service Fee only (non-taxable)</a:t>
+            </a:r>
+          </a:p>
+          <a:p>
+            <a:pPr>
+              <a:spcBef>
+                <a:spcPts val="600"/>
               </a:spcBef>
               <a:defRPr sz="1500" b="0">
                 <a:solidFill>
@@ -4043,68 +3955,34 @@
               </a:defRPr>
             </a:pPr>
             <a:r>
-              <a:t>  3. Tax = calculated on Service Fee only</a:t>
-            </a:r>
-          </a:p>
-          <a:p>
-            <a:pPr>
-              <a:spcBef>
-                <a:spcPts val="200"/>
-              </a:spcBef>
-              <a:defRPr sz="1400" b="0">
+              <a:t>Net Pay = Total - Tax</a:t>
+            </a:r>
+          </a:p>
+          <a:p>
+            <a:pPr>
+              <a:spcBef>
+                <a:spcPts val="600"/>
+              </a:spcBef>
+              <a:defRPr sz="800" b="0">
                 <a:solidFill>
                   <a:srgbClr val="999999"/>
                 </a:solidFill>
               </a:defRPr>
             </a:pPr>
-            <a:r>
-              <a:t>     (expenses are non-taxable reimbursements)</a:t>
-            </a:r>
-          </a:p>
-          <a:p>
-            <a:pPr>
-              <a:spcBef>
-                <a:spcPts val="400"/>
+          </a:p>
+          <a:p>
+            <a:pPr>
+              <a:spcBef>
+                <a:spcPts val="1400"/>
               </a:spcBef>
               <a:defRPr sz="1500" b="0">
                 <a:solidFill>
-                  <a:srgbClr val="CCCCCC"/>
-                </a:solidFill>
-              </a:defRPr>
-            </a:pPr>
-            <a:r>
-              <a:t>  4. Net Pay = Total KRW - Tax</a:t>
-            </a:r>
-          </a:p>
-          <a:p>
-            <a:pPr>
-              <a:spcBef>
-                <a:spcPts val="600"/>
-              </a:spcBef>
-              <a:defRPr sz="800" b="0">
-                <a:solidFill>
-                  <a:srgbClr val="999999"/>
-                </a:solidFill>
-              </a:defRPr>
-            </a:pPr>
-          </a:p>
-          <a:p>
-            <a:pPr>
-              <a:spcBef>
-                <a:spcPts val="1000"/>
-              </a:spcBef>
-              <a:defRPr sz="1500" b="0">
-                <a:solidFill>
                   <a:srgbClr val="F59E0B"/>
                 </a:solidFill>
               </a:defRPr>
             </a:pPr>
             <a:r>
-              <a:t>This matters because net pay goes directly</a:t>
-            </a:r>
-            <a:br/>
-            <a:r>
-              <a:t>into payslip PDFs and actual transfers.</a:t>
+              <a:t>Goes directly into payslip PDF</a:t>
             </a:r>
           </a:p>
         </p:txBody>
@@ -4165,7 +4043,7 @@
               </a:defRPr>
             </a:pPr>
             <a:r>
-              <a:t>Update 3 — USD Display in Summary Totals</a:t>
+              <a:t>Fix 3 &amp; 4 — USD Totals + Inline Editing</a:t>
             </a:r>
           </a:p>
         </p:txBody>
@@ -4179,7 +4057,7 @@
         <p:spPr>
           <a:xfrm>
             <a:off x="914400" y="1828800"/>
-            <a:ext cx="5029200" cy="3657600"/>
+            <a:ext cx="5029200" cy="2743200"/>
           </a:xfrm>
           <a:prstGeom prst="rect">
             <a:avLst/>
@@ -4200,7 +4078,7 @@
               </a:defRPr>
             </a:pPr>
             <a:r>
-              <a:t>Change</a:t>
+              <a:t>USD in Summary Row</a:t>
             </a:r>
           </a:p>
           <a:p>
@@ -4215,11 +4093,7 @@
               </a:defRPr>
             </a:pPr>
             <a:r>
-              <a:t>Tax total and net pay total in footer row</a:t>
-            </a:r>
-            <a:br/>
-            <a:r>
-              <a:t>now show USD conversion underneath</a:t>
+              <a:t>We think in USDT, report in KRW</a:t>
             </a:r>
           </a:p>
           <a:p>
@@ -4227,6 +4101,36 @@
               <a:spcBef>
                 <a:spcPts val="600"/>
               </a:spcBef>
+              <a:defRPr sz="1600" b="0">
+                <a:solidFill>
+                  <a:srgbClr val="CCCCCC"/>
+                </a:solidFill>
+              </a:defRPr>
+            </a:pPr>
+            <a:r>
+              <a:t>Now both visible at a glance</a:t>
+            </a:r>
+          </a:p>
+          <a:p>
+            <a:pPr>
+              <a:spcBef>
+                <a:spcPts val="600"/>
+              </a:spcBef>
+              <a:defRPr sz="1600" b="0">
+                <a:solidFill>
+                  <a:srgbClr val="CCCCCC"/>
+                </a:solidFill>
+              </a:defRPr>
+            </a:pPr>
+            <a:r>
+              <a:t>No more mental conversion</a:t>
+            </a:r>
+          </a:p>
+          <a:p>
+            <a:pPr>
+              <a:spcBef>
+                <a:spcPts val="600"/>
+              </a:spcBef>
               <a:defRPr sz="800" b="0">
                 <a:solidFill>
                   <a:srgbClr val="999999"/>
@@ -4239,29 +4143,29 @@
               <a:spcBef>
                 <a:spcPts val="1000"/>
               </a:spcBef>
-              <a:defRPr sz="1600" b="1">
+              <a:defRPr sz="1500" b="1">
                 <a:solidFill>
                   <a:srgbClr val="FFFFFF"/>
                 </a:solidFill>
               </a:defRPr>
             </a:pPr>
             <a:r>
-              <a:t>Applied to:</a:t>
-            </a:r>
-          </a:p>
-          <a:p>
-            <a:pPr>
-              <a:spcBef>
-                <a:spcPts val="800"/>
+              <a:t>Example (May, 6 members):</a:t>
+            </a:r>
+          </a:p>
+          <a:p>
+            <a:pPr>
+              <a:spcBef>
+                <a:spcPts val="600"/>
               </a:spcBef>
               <a:defRPr sz="1500" b="0">
                 <a:solidFill>
-                  <a:srgbClr val="CCCCCC"/>
-                </a:solidFill>
-              </a:defRPr>
-            </a:pPr>
-            <a:r>
-              <a:t>  -  Payroll Management page (monthly view)</a:t>
+                  <a:srgbClr val="F59E0B"/>
+                </a:solidFill>
+              </a:defRPr>
+            </a:pPr>
+            <a:r>
+              <a:t>  Tax: ₩15.7M / $10,449</a:t>
             </a:r>
           </a:p>
           <a:p>
@@ -4271,12 +4175,12 @@
               </a:spcBef>
               <a:defRPr sz="1500" b="0">
                 <a:solidFill>
-                  <a:srgbClr val="CCCCCC"/>
-                </a:solidFill>
-              </a:defRPr>
-            </a:pPr>
-            <a:r>
-              <a:t>  -  Payroll Calculation page (preview result)</a:t>
+                  <a:srgbClr val="10B981"/>
+                </a:solidFill>
+              </a:defRPr>
+            </a:pPr>
+            <a:r>
+              <a:t>  Net: ₩58.6M / $39,003</a:t>
             </a:r>
           </a:p>
         </p:txBody>
@@ -4311,7 +4215,7 @@
               </a:defRPr>
             </a:pPr>
             <a:r>
-              <a:t>Why</a:t>
+              <a:t>Candidate Inline Edit</a:t>
             </a:r>
           </a:p>
           <a:p>
@@ -4326,13 +4230,13 @@
               </a:defRPr>
             </a:pPr>
             <a:r>
-              <a:t>We think in USDT but report in KRW.</a:t>
-            </a:r>
-          </a:p>
-          <a:p>
-            <a:pPr>
-              <a:spcBef>
-                <a:spcPts val="800"/>
+              <a:t>Reviewer / Comment — click to edit</a:t>
+            </a:r>
+          </a:p>
+          <a:p>
+            <a:pPr>
+              <a:spcBef>
+                <a:spcPts val="600"/>
               </a:spcBef>
               <a:defRPr sz="1600" b="0">
                 <a:solidFill>
@@ -4341,11 +4245,7 @@
               </a:defRPr>
             </a:pPr>
             <a:r>
-              <a:t>Having both visible at a glance</a:t>
-            </a:r>
-            <a:br/>
-            <a:r>
-              <a:t>eliminates mental conversion.</a:t>
+              <a:t>No separate form, no page reload</a:t>
             </a:r>
           </a:p>
           <a:p>
@@ -4353,7 +4253,7 @@
               <a:spcBef>
                 <a:spcPts val="600"/>
               </a:spcBef>
-              <a:defRPr sz="1000" b="0">
+              <a:defRPr sz="800" b="0">
                 <a:solidFill>
                   <a:srgbClr val="999999"/>
                 </a:solidFill>
@@ -4365,29 +4265,29 @@
               <a:spcBef>
                 <a:spcPts val="1400"/>
               </a:spcBef>
-              <a:defRPr sz="1600" b="1">
-                <a:solidFill>
-                  <a:srgbClr val="FFFFFF"/>
-                </a:solidFill>
-              </a:defRPr>
-            </a:pPr>
-            <a:r>
-              <a:t>Example (May 2026, 6 members):</a:t>
-            </a:r>
-          </a:p>
-          <a:p>
-            <a:pPr>
-              <a:spcBef>
-                <a:spcPts val="800"/>
-              </a:spcBef>
-              <a:defRPr sz="1500" b="0">
-                <a:solidFill>
-                  <a:srgbClr val="F59E0B"/>
-                </a:solidFill>
-              </a:defRPr>
-            </a:pPr>
-            <a:r>
-              <a:t>  Tax:     ₩15,702,508  /  $10,449</a:t>
+              <a:defRPr sz="1600" b="0">
+                <a:solidFill>
+                  <a:srgbClr val="CCCCCC"/>
+                </a:solidFill>
+              </a:defRPr>
+            </a:pPr>
+            <a:r>
+              <a:t>Re-Analyze button added</a:t>
+            </a:r>
+          </a:p>
+          <a:p>
+            <a:pPr>
+              <a:spcBef>
+                <a:spcPts val="600"/>
+              </a:spcBef>
+              <a:defRPr sz="1600" b="0">
+                <a:solidFill>
+                  <a:srgbClr val="CCCCCC"/>
+                </a:solidFill>
+              </a:defRPr>
+            </a:pPr>
+            <a:r>
+              <a:t>Can re-run AI evaluation anytime</a:t>
             </a:r>
           </a:p>
           <a:p>
@@ -4395,14 +4295,14 @@
               <a:spcBef>
                 <a:spcPts val="400"/>
               </a:spcBef>
-              <a:defRPr sz="1500" b="0">
-                <a:solidFill>
-                  <a:srgbClr val="10B981"/>
-                </a:solidFill>
-              </a:defRPr>
-            </a:pPr>
-            <a:r>
-              <a:t>  Net Pay: ₩58,613,958  /  $39,003</a:t>
+              <a:defRPr sz="1400" b="0">
+                <a:solidFill>
+                  <a:srgbClr val="999999"/>
+                </a:solidFill>
+              </a:defRPr>
+            </a:pPr>
+            <a:r>
+              <a:t>(needed for benchmark feature)</a:t>
             </a:r>
           </a:p>
         </p:txBody>
@@ -4463,7 +4363,7 @@
               </a:defRPr>
             </a:pPr>
             <a:r>
-              <a:t>Update 4 — Candidate Inline Review Editing</a:t>
+              <a:t>New Idea — Org Benchmark Comparison</a:t>
             </a:r>
           </a:p>
         </p:txBody>
@@ -4498,7 +4398,7 @@
               </a:defRPr>
             </a:pPr>
             <a:r>
-              <a:t>Improvement</a:t>
+              <a:t>What</a:t>
             </a:r>
           </a:p>
           <a:p>
@@ -4513,11 +4413,22 @@
               </a:defRPr>
             </a:pPr>
             <a:r>
-              <a:t>Reviewer and Comment columns are now</a:t>
-            </a:r>
-            <a:br/>
-            <a:r>
-              <a:t>editable directly in the table</a:t>
+              <a:t>Compare candidate's repo against</a:t>
+            </a:r>
+          </a:p>
+          <a:p>
+            <a:pPr>
+              <a:spcBef>
+                <a:spcPts val="400"/>
+              </a:spcBef>
+              <a:defRPr sz="1600" b="0">
+                <a:solidFill>
+                  <a:srgbClr val="CCCCCC"/>
+                </a:solidFill>
+              </a:defRPr>
+            </a:pPr>
+            <a:r>
+              <a:t>Tokamak Network's own recent repos</a:t>
             </a:r>
           </a:p>
           <a:p>
@@ -4559,7 +4470,7 @@
               </a:defRPr>
             </a:pPr>
             <a:r>
-              <a:t>  -  Click reviewer name → inline input field</a:t>
+              <a:t>  1. Clone recent active repos from our org</a:t>
             </a:r>
           </a:p>
           <a:p>
@@ -4574,7 +4485,7 @@
               </a:defRPr>
             </a:pPr>
             <a:r>
-              <a:t>  -  Click comment → inline textarea</a:t>
+              <a:t>  2. Measure quality metrics</a:t>
             </a:r>
           </a:p>
           <a:p>
@@ -4589,7 +4500,7 @@
               </a:defRPr>
             </a:pPr>
             <a:r>
-              <a:t>  -  Save / Cancel buttons appear inline</a:t>
+              <a:t>  3. Build a benchmark profile</a:t>
             </a:r>
           </a:p>
           <a:p>
@@ -4604,22 +4515,7 @@
               </a:defRPr>
             </a:pPr>
             <a:r>
-              <a:t>  -  Empty fields show "+ Reviewer" placeholder</a:t>
-            </a:r>
-          </a:p>
-          <a:p>
-            <a:pPr>
-              <a:spcBef>
-                <a:spcPts val="400"/>
-              </a:spcBef>
-              <a:defRPr sz="1500" b="0">
-                <a:solidFill>
-                  <a:srgbClr val="CCCCCC"/>
-                </a:solidFill>
-              </a:defRPr>
-            </a:pPr>
-            <a:r>
-              <a:t>  -  Long comments: click to expand/collapse</a:t>
+              <a:t>  4. AI compares candidate vs benchmark</a:t>
             </a:r>
           </a:p>
         </p:txBody>
@@ -4633,7 +4529,7 @@
         <p:spPr>
           <a:xfrm>
             <a:off x="6400800" y="1828800"/>
-            <a:ext cx="4572000" cy="2286000"/>
+            <a:ext cx="4572000" cy="3657600"/>
           </a:xfrm>
           <a:prstGeom prst="rect">
             <a:avLst/>
@@ -4647,14 +4543,71 @@
           <a:lstStyle/>
           <a:p>
             <a:pPr algn="l">
-              <a:defRPr sz="1800" b="1">
+              <a:defRPr sz="2000" b="1">
+                <a:solidFill>
+                  <a:srgbClr val="2A72E5"/>
+                </a:solidFill>
+              </a:defRPr>
+            </a:pPr>
+            <a:r>
+              <a:t>Why</a:t>
+            </a:r>
+          </a:p>
+          <a:p>
+            <a:pPr>
+              <a:spcBef>
+                <a:spcPts val="1000"/>
+              </a:spcBef>
+              <a:defRPr sz="1600" b="0">
                 <a:solidFill>
                   <a:srgbClr val="999999"/>
                 </a:solidFill>
               </a:defRPr>
             </a:pPr>
             <a:r>
-              <a:t>Before</a:t>
+              <a:t>Before: AI scored in isolation</a:t>
+            </a:r>
+          </a:p>
+          <a:p>
+            <a:pPr>
+              <a:spcBef>
+                <a:spcPts val="600"/>
+              </a:spcBef>
+              <a:defRPr sz="1600" b="0">
+                <a:solidFill>
+                  <a:srgbClr val="10B981"/>
+                </a:solidFill>
+              </a:defRPr>
+            </a:pPr>
+            <a:r>
+              <a:t>Now: compared to our actual codebase</a:t>
+            </a:r>
+          </a:p>
+          <a:p>
+            <a:pPr>
+              <a:spcBef>
+                <a:spcPts val="600"/>
+              </a:spcBef>
+              <a:defRPr sz="800" b="0">
+                <a:solidFill>
+                  <a:srgbClr val="999999"/>
+                </a:solidFill>
+              </a:defRPr>
+            </a:pPr>
+          </a:p>
+          <a:p>
+            <a:pPr>
+              <a:spcBef>
+                <a:spcPts val="1000"/>
+              </a:spcBef>
+              <a:defRPr sz="1600" b="1">
+                <a:solidFill>
+                  <a:srgbClr val="FFFFFF"/>
+                </a:solidFill>
+              </a:defRPr>
+            </a:pPr>
+            <a:r>
+              <a:t>Result:</a:t>
             </a:r>
           </a:p>
           <a:p>
@@ -4664,62 +4617,69 @@
               </a:spcBef>
               <a:defRPr sz="1500" b="0">
                 <a:solidFill>
+                  <a:srgbClr val="CCCCCC"/>
+                </a:solidFill>
+              </a:defRPr>
+            </a:pPr>
+            <a:r>
+              <a:t>  "Above / On Par / Below"</a:t>
+            </a:r>
+          </a:p>
+          <a:p>
+            <a:pPr>
+              <a:spcBef>
+                <a:spcPts val="400"/>
+              </a:spcBef>
+              <a:defRPr sz="1500" b="0">
+                <a:solidFill>
+                  <a:srgbClr val="CCCCCC"/>
+                </a:solidFill>
+              </a:defRPr>
+            </a:pPr>
+            <a:r>
+              <a:t>  for each quality category</a:t>
+            </a:r>
+          </a:p>
+          <a:p>
+            <a:pPr>
+              <a:spcBef>
+                <a:spcPts val="600"/>
+              </a:spcBef>
+              <a:defRPr sz="800" b="0">
+                <a:solidFill>
                   <a:srgbClr val="999999"/>
                 </a:solidFill>
               </a:defRPr>
             </a:pPr>
-            <a:r>
-              <a:t>Read-only display, no way to edit</a:t>
-            </a:r>
-            <a:br/>
-            <a:r>
-              <a:t>without a separate form</a:t>
-            </a:r>
-          </a:p>
-          <a:p>
-            <a:pPr>
-              <a:spcBef>
-                <a:spcPts val="600"/>
-              </a:spcBef>
-              <a:defRPr sz="1000" b="0">
-                <a:solidFill>
-                  <a:srgbClr val="999999"/>
-                </a:solidFill>
-              </a:defRPr>
-            </a:pPr>
-          </a:p>
-          <a:p>
-            <a:pPr>
-              <a:spcBef>
-                <a:spcPts val="1600"/>
-              </a:spcBef>
-              <a:defRPr sz="1800" b="1">
-                <a:solidFill>
-                  <a:srgbClr val="10B981"/>
-                </a:solidFill>
-              </a:defRPr>
-            </a:pPr>
-            <a:r>
-              <a:t>After</a:t>
-            </a:r>
-          </a:p>
-          <a:p>
-            <a:pPr>
-              <a:spcBef>
-                <a:spcPts val="800"/>
+          </a:p>
+          <a:p>
+            <a:pPr>
+              <a:spcBef>
+                <a:spcPts val="1400"/>
               </a:spcBef>
               <a:defRPr sz="1500" b="0">
                 <a:solidFill>
-                  <a:srgbClr val="CCCCCC"/>
-                </a:solidFill>
-              </a:defRPr>
-            </a:pPr>
-            <a:r>
-              <a:t>Click → edit → save, all in the same row</a:t>
-            </a:r>
-            <a:br/>
-            <a:r>
-              <a:t>No modal, no page reload</a:t>
+                  <a:srgbClr val="F59E0B"/>
+                </a:solidFill>
+              </a:defRPr>
+            </a:pPr>
+            <a:r>
+              <a:t>Still early — first version</a:t>
+            </a:r>
+          </a:p>
+          <a:p>
+            <a:pPr>
+              <a:spcBef>
+                <a:spcPts val="400"/>
+              </a:spcBef>
+              <a:defRPr sz="1500" b="0">
+                <a:solidFill>
+                  <a:srgbClr val="F59E0B"/>
+                </a:solidFill>
+              </a:defRPr>
+            </a:pPr>
+            <a:r>
+              <a:t>Exploring better metrics</a:t>
             </a:r>
           </a:p>
         </p:txBody>
@@ -4780,7 +4740,7 @@
               </a:defRPr>
             </a:pPr>
             <a:r>
-              <a:t>Platform Status — May 2026</a:t>
+              <a:t>Benchmark — Quality Density Metrics</a:t>
             </a:r>
           </a:p>
         </p:txBody>
@@ -4793,8 +4753,8 @@
         </p:nvSpPr>
         <p:spPr>
           <a:xfrm>
-            <a:off x="914400" y="1828800"/>
-            <a:ext cx="5486400" cy="3657600"/>
+            <a:off x="914400" y="1463040"/>
+            <a:ext cx="9144000" cy="457200"/>
           </a:xfrm>
           <a:prstGeom prst="rect">
             <a:avLst/>
@@ -4808,134 +4768,14 @@
           <a:lstStyle/>
           <a:p>
             <a:pPr algn="l">
-              <a:defRPr sz="2000" b="1">
-                <a:solidFill>
-                  <a:srgbClr val="2A72E5"/>
-                </a:solidFill>
-              </a:defRPr>
-            </a:pPr>
-            <a:r>
-              <a:t>Modules</a:t>
-            </a:r>
-          </a:p>
-          <a:p>
-            <a:pPr>
-              <a:spcBef>
-                <a:spcPts val="1200"/>
-              </a:spcBef>
-              <a:defRPr sz="1600" b="1">
-                <a:solidFill>
-                  <a:srgbClr val="FFFFFF"/>
-                </a:solidFill>
-              </a:defRPr>
-            </a:pPr>
-            <a:r>
-              <a:t>  Hiring</a:t>
-            </a:r>
-          </a:p>
-          <a:p>
-            <a:pPr>
-              <a:spcBef>
-                <a:spcPts val="200"/>
-              </a:spcBef>
-              <a:defRPr sz="1400" b="0">
-                <a:solidFill>
-                  <a:srgbClr val="10B981"/>
-                </a:solidFill>
-              </a:defRPr>
-            </a:pPr>
-            <a:r>
-              <a:t>    AI evaluation, GitHub monitor, sourcing, team mgmt, inline review  [LIVE]</a:t>
-            </a:r>
-          </a:p>
-          <a:p>
-            <a:pPr>
-              <a:spcBef>
-                <a:spcPts val="1200"/>
-              </a:spcBef>
-              <a:defRPr sz="1600" b="1">
-                <a:solidFill>
-                  <a:srgbClr val="FFFFFF"/>
-                </a:solidFill>
-              </a:defRPr>
-            </a:pPr>
-            <a:r>
-              <a:t>  HR Management</a:t>
-            </a:r>
-          </a:p>
-          <a:p>
-            <a:pPr>
-              <a:spcBef>
-                <a:spcPts val="200"/>
-              </a:spcBef>
-              <a:defRPr sz="1400" b="0">
-                <a:solidFill>
-                  <a:srgbClr val="10B981"/>
-                </a:solidFill>
-              </a:defRPr>
-            </a:pPr>
-            <a:r>
-              <a:t>    payroll, expenses, recalculation, bulk ops, payslip PDF  [LIVE]</a:t>
-            </a:r>
-          </a:p>
-          <a:p>
-            <a:pPr>
-              <a:spcBef>
-                <a:spcPts val="1200"/>
-              </a:spcBef>
-              <a:defRPr sz="1600" b="1">
-                <a:solidFill>
-                  <a:srgbClr val="FFFFFF"/>
-                </a:solidFill>
-              </a:defRPr>
-            </a:pPr>
-            <a:r>
-              <a:t>  Accounting</a:t>
-            </a:r>
-          </a:p>
-          <a:p>
-            <a:pPr>
-              <a:spcBef>
-                <a:spcPts val="200"/>
-              </a:spcBef>
-              <a:defRPr sz="1400" b="0">
-                <a:solidFill>
-                  <a:srgbClr val="10B981"/>
-                </a:solidFill>
-              </a:defRPr>
-            </a:pPr>
-            <a:r>
-              <a:t>    transaction classifier, invoices, document repository  [LIVE]</a:t>
-            </a:r>
-          </a:p>
-          <a:p>
-            <a:pPr>
-              <a:spcBef>
-                <a:spcPts val="1200"/>
-              </a:spcBef>
-              <a:defRPr sz="1600" b="1">
-                <a:solidFill>
-                  <a:srgbClr val="FFFFFF"/>
-                </a:solidFill>
-              </a:defRPr>
-            </a:pPr>
-            <a:r>
-              <a:t>  Deployment</a:t>
-            </a:r>
-          </a:p>
-          <a:p>
-            <a:pPr>
-              <a:spcBef>
-                <a:spcPts val="200"/>
-              </a:spcBef>
-              <a:defRPr sz="1400" b="0">
-                <a:solidFill>
-                  <a:srgbClr val="F59E0B"/>
-                </a:solidFill>
-              </a:defRPr>
-            </a:pPr>
-            <a:r>
-              <a:t>    Supabase DB + Railway backend live, Vercel pending  [PARTIAL]</a:t>
+              <a:defRPr sz="1600" b="0">
+                <a:solidFill>
+                  <a:srgbClr val="999999"/>
+                </a:solidFill>
+              </a:defRPr>
+            </a:pPr>
+            <a:r>
+              <a:t>Not file count or commit count — those favor older repos. Focus on quality.</a:t>
             </a:r>
           </a:p>
         </p:txBody>
@@ -4948,8 +4788,8 @@
         </p:nvSpPr>
         <p:spPr>
           <a:xfrm>
-            <a:off x="6858000" y="1828800"/>
-            <a:ext cx="4572000" cy="1828800"/>
+            <a:off x="914400" y="2286000"/>
+            <a:ext cx="2286000" cy="2743200"/>
           </a:xfrm>
           <a:prstGeom prst="rect">
             <a:avLst/>
@@ -4963,21 +4803,6 @@
           <a:lstStyle/>
           <a:p>
             <a:pPr algn="l">
-              <a:defRPr sz="2000" b="1">
-                <a:solidFill>
-                  <a:srgbClr val="2A72E5"/>
-                </a:solidFill>
-              </a:defRPr>
-            </a:pPr>
-            <a:r>
-              <a:t>Numbers</a:t>
-            </a:r>
-          </a:p>
-          <a:p>
-            <a:pPr>
-              <a:spcBef>
-                <a:spcPts val="1400"/>
-              </a:spcBef>
               <a:defRPr sz="1800" b="1">
                 <a:solidFill>
                   <a:srgbClr val="FFFFFF"/>
@@ -4985,14 +4810,76 @@
               </a:defRPr>
             </a:pPr>
             <a:r>
-              <a:t>53+ API endpoints</a:t>
-            </a:r>
-          </a:p>
-          <a:p>
-            <a:pPr>
-              <a:spcBef>
-                <a:spcPts val="800"/>
-              </a:spcBef>
+              <a:t>Test Presence</a:t>
+            </a:r>
+          </a:p>
+          <a:p>
+            <a:pPr>
+              <a:spcBef>
+                <a:spcPts val="1000"/>
+              </a:spcBef>
+              <a:defRPr sz="1400" b="0">
+                <a:solidFill>
+                  <a:srgbClr val="CCCCCC"/>
+                </a:solidFill>
+              </a:defRPr>
+            </a:pPr>
+            <a:r>
+              <a:t>Does the repo have tests?</a:t>
+            </a:r>
+          </a:p>
+          <a:p>
+            <a:pPr>
+              <a:spcBef>
+                <a:spcPts val="600"/>
+              </a:spcBef>
+              <a:defRPr sz="600" b="0">
+                <a:solidFill>
+                  <a:srgbClr val="999999"/>
+                </a:solidFill>
+              </a:defRPr>
+            </a:pPr>
+          </a:p>
+          <a:p>
+            <a:pPr>
+              <a:spcBef>
+                <a:spcPts val="1000"/>
+              </a:spcBef>
+              <a:defRPr sz="1300" b="0">
+                <a:solidFill>
+                  <a:srgbClr val="F59E0B"/>
+                </a:solidFill>
+              </a:defRPr>
+            </a:pPr>
+            <a:r>
+              <a:t>50% of our repos do</a:t>
+            </a:r>
+          </a:p>
+        </p:txBody>
+      </p:sp>
+      <p:sp>
+        <p:nvSpPr>
+          <p:cNvPr id="5" name="TextBox 4"/>
+          <p:cNvSpPr txBox="1"/>
+          <p:nvPr/>
+        </p:nvSpPr>
+        <p:spPr>
+          <a:xfrm>
+            <a:off x="3657600" y="2286000"/>
+            <a:ext cx="2286000" cy="2743200"/>
+          </a:xfrm>
+          <a:prstGeom prst="rect">
+            <a:avLst/>
+          </a:prstGeom>
+          <a:noFill/>
+        </p:spPr>
+        <p:txBody>
+          <a:bodyPr wrap="square">
+            <a:spAutoFit/>
+          </a:bodyPr>
+          <a:lstStyle/>
+          <a:p>
+            <a:pPr algn="l">
               <a:defRPr sz="1800" b="1">
                 <a:solidFill>
                   <a:srgbClr val="FFFFFF"/>
@@ -5000,14 +4887,80 @@
               </a:defRPr>
             </a:pPr>
             <a:r>
-              <a:t>20 DB tables</a:t>
-            </a:r>
-          </a:p>
-          <a:p>
-            <a:pPr>
-              <a:spcBef>
-                <a:spcPts val="800"/>
-              </a:spcBef>
+              <a:t>Documentation</a:t>
+            </a:r>
+          </a:p>
+          <a:p>
+            <a:pPr>
+              <a:spcBef>
+                <a:spcPts val="1000"/>
+              </a:spcBef>
+              <a:defRPr sz="1400" b="0">
+                <a:solidFill>
+                  <a:srgbClr val="CCCCCC"/>
+                </a:solidFill>
+              </a:defRPr>
+            </a:pPr>
+            <a:r>
+              <a:t>README with sections,</a:t>
+            </a:r>
+            <a:br/>
+            <a:r>
+              <a:t>install guide, code examples</a:t>
+            </a:r>
+          </a:p>
+          <a:p>
+            <a:pPr>
+              <a:spcBef>
+                <a:spcPts val="600"/>
+              </a:spcBef>
+              <a:defRPr sz="600" b="0">
+                <a:solidFill>
+                  <a:srgbClr val="999999"/>
+                </a:solidFill>
+              </a:defRPr>
+            </a:pPr>
+          </a:p>
+          <a:p>
+            <a:pPr>
+              <a:spcBef>
+                <a:spcPts val="1000"/>
+              </a:spcBef>
+              <a:defRPr sz="1300" b="0">
+                <a:solidFill>
+                  <a:srgbClr val="F59E0B"/>
+                </a:solidFill>
+              </a:defRPr>
+            </a:pPr>
+            <a:r>
+              <a:t>90% have structured docs</a:t>
+            </a:r>
+          </a:p>
+        </p:txBody>
+      </p:sp>
+      <p:sp>
+        <p:nvSpPr>
+          <p:cNvPr id="6" name="TextBox 5"/>
+          <p:cNvSpPr txBox="1"/>
+          <p:nvPr/>
+        </p:nvSpPr>
+        <p:spPr>
+          <a:xfrm>
+            <a:off x="6400800" y="2286000"/>
+            <a:ext cx="2286000" cy="2743200"/>
+          </a:xfrm>
+          <a:prstGeom prst="rect">
+            <a:avLst/>
+          </a:prstGeom>
+          <a:noFill/>
+        </p:spPr>
+        <p:txBody>
+          <a:bodyPr wrap="square">
+            <a:spAutoFit/>
+          </a:bodyPr>
+          <a:lstStyle/>
+          <a:p>
+            <a:pPr algn="l">
               <a:defRPr sz="1800" b="1">
                 <a:solidFill>
                   <a:srgbClr val="FFFFFF"/>
@@ -5015,22 +4968,169 @@
               </a:defRPr>
             </a:pPr>
             <a:r>
-              <a:t>97 classification rules</a:t>
-            </a:r>
-          </a:p>
-          <a:p>
-            <a:pPr>
-              <a:spcBef>
-                <a:spcPts val="1400"/>
-              </a:spcBef>
-              <a:defRPr sz="1600" b="0">
-                <a:solidFill>
-                  <a:srgbClr val="10B981"/>
-                </a:solidFill>
-              </a:defRPr>
-            </a:pPr>
-            <a:r>
-              <a:t>+3 new endpoints this week</a:t>
+              <a:t>Code Organization</a:t>
+            </a:r>
+          </a:p>
+          <a:p>
+            <a:pPr>
+              <a:spcBef>
+                <a:spcPts val="1000"/>
+              </a:spcBef>
+              <a:defRPr sz="1400" b="0">
+                <a:solidFill>
+                  <a:srgbClr val="CCCCCC"/>
+                </a:solidFill>
+              </a:defRPr>
+            </a:pPr>
+            <a:r>
+              <a:t>Config files, CI/CD,</a:t>
+            </a:r>
+            <a:br/>
+            <a:r>
+              <a:t>modular directories</a:t>
+            </a:r>
+          </a:p>
+          <a:p>
+            <a:pPr>
+              <a:spcBef>
+                <a:spcPts val="600"/>
+              </a:spcBef>
+              <a:defRPr sz="600" b="0">
+                <a:solidFill>
+                  <a:srgbClr val="999999"/>
+                </a:solidFill>
+              </a:defRPr>
+            </a:pPr>
+          </a:p>
+          <a:p>
+            <a:pPr>
+              <a:spcBef>
+                <a:spcPts val="1000"/>
+              </a:spcBef>
+              <a:defRPr sz="1300" b="0">
+                <a:solidFill>
+                  <a:srgbClr val="F59E0B"/>
+                </a:solidFill>
+              </a:defRPr>
+            </a:pPr>
+            <a:r>
+              <a:t>Avg 3.1 config files</a:t>
+            </a:r>
+          </a:p>
+        </p:txBody>
+      </p:sp>
+      <p:sp>
+        <p:nvSpPr>
+          <p:cNvPr id="7" name="TextBox 6"/>
+          <p:cNvSpPr txBox="1"/>
+          <p:nvPr/>
+        </p:nvSpPr>
+        <p:spPr>
+          <a:xfrm>
+            <a:off x="9144000" y="2286000"/>
+            <a:ext cx="2286000" cy="2743200"/>
+          </a:xfrm>
+          <a:prstGeom prst="rect">
+            <a:avLst/>
+          </a:prstGeom>
+          <a:noFill/>
+        </p:spPr>
+        <p:txBody>
+          <a:bodyPr wrap="square">
+            <a:spAutoFit/>
+          </a:bodyPr>
+          <a:lstStyle/>
+          <a:p>
+            <a:pPr algn="l">
+              <a:defRPr sz="1800" b="1">
+                <a:solidFill>
+                  <a:srgbClr val="FFFFFF"/>
+                </a:solidFill>
+              </a:defRPr>
+            </a:pPr>
+            <a:r>
+              <a:t>Language Alignment</a:t>
+            </a:r>
+          </a:p>
+          <a:p>
+            <a:pPr>
+              <a:spcBef>
+                <a:spcPts val="1000"/>
+              </a:spcBef>
+              <a:defRPr sz="1400" b="0">
+                <a:solidFill>
+                  <a:srgbClr val="CCCCCC"/>
+                </a:solidFill>
+              </a:defRPr>
+            </a:pPr>
+            <a:r>
+              <a:t>Overlap with our stack:</a:t>
+            </a:r>
+            <a:br/>
+            <a:r>
+              <a:t>TS, Solidity, Go</a:t>
+            </a:r>
+          </a:p>
+          <a:p>
+            <a:pPr>
+              <a:spcBef>
+                <a:spcPts val="600"/>
+              </a:spcBef>
+              <a:defRPr sz="600" b="0">
+                <a:solidFill>
+                  <a:srgbClr val="999999"/>
+                </a:solidFill>
+              </a:defRPr>
+            </a:pPr>
+          </a:p>
+          <a:p>
+            <a:pPr>
+              <a:spcBef>
+                <a:spcPts val="1000"/>
+              </a:spcBef>
+              <a:defRPr sz="1300" b="0">
+                <a:solidFill>
+                  <a:srgbClr val="F59E0B"/>
+                </a:solidFill>
+              </a:defRPr>
+            </a:pPr>
+            <a:r>
+              <a:t>Direct compatibility</a:t>
+            </a:r>
+          </a:p>
+        </p:txBody>
+      </p:sp>
+      <p:sp>
+        <p:nvSpPr>
+          <p:cNvPr id="8" name="TextBox 7"/>
+          <p:cNvSpPr txBox="1"/>
+          <p:nvPr/>
+        </p:nvSpPr>
+        <p:spPr>
+          <a:xfrm>
+            <a:off x="914400" y="5029200"/>
+            <a:ext cx="10058400" cy="731520"/>
+          </a:xfrm>
+          <a:prstGeom prst="rect">
+            <a:avLst/>
+          </a:prstGeom>
+          <a:noFill/>
+        </p:spPr>
+        <p:txBody>
+          <a:bodyPr wrap="square">
+            <a:spAutoFit/>
+          </a:bodyPr>
+          <a:lstStyle/>
+          <a:p>
+            <a:pPr algn="l">
+              <a:defRPr sz="1500" b="0">
+                <a:solidFill>
+                  <a:srgbClr val="999999"/>
+                </a:solidFill>
+              </a:defRPr>
+            </a:pPr>
+            <a:r>
+              <a:t>These metrics don't depend on repo age — fair comparison for short-term submissions</a:t>
             </a:r>
           </a:p>
         </p:txBody>
@@ -5091,7 +5191,7 @@
               </a:defRPr>
             </a:pPr>
             <a:r>
-              <a:t>What's Next</a:t>
+              <a:t>Status + What's Next</a:t>
             </a:r>
           </a:p>
         </p:txBody>
@@ -5121,42 +5221,72 @@
             <a:pPr algn="l">
               <a:defRPr sz="2000" b="1">
                 <a:solidFill>
-                  <a:srgbClr val="2A72E5"/>
-                </a:solidFill>
-              </a:defRPr>
-            </a:pPr>
-            <a:r>
-              <a:t>This Month</a:t>
-            </a:r>
-          </a:p>
-          <a:p>
-            <a:pPr>
-              <a:spcBef>
-                <a:spcPts val="1000"/>
-              </a:spcBef>
-              <a:defRPr sz="1600" b="0">
+                  <a:srgbClr val="10B981"/>
+                </a:solidFill>
+              </a:defRPr>
+            </a:pPr>
+            <a:r>
+              <a:t>Done This Week</a:t>
+            </a:r>
+          </a:p>
+          <a:p>
+            <a:pPr>
+              <a:spcBef>
+                <a:spcPts val="800"/>
+              </a:spcBef>
+              <a:defRPr sz="1500" b="0">
                 <a:solidFill>
                   <a:srgbClr val="CCCCCC"/>
                 </a:solidFill>
               </a:defRPr>
             </a:pPr>
             <a:r>
-              <a:t>  -  Upload 6 years of accounting documents (YA2020-YA2025)</a:t>
-            </a:r>
-          </a:p>
-          <a:p>
-            <a:pPr>
-              <a:spcBef>
-                <a:spcPts val="600"/>
-              </a:spcBef>
-              <a:defRPr sz="1600" b="0">
+              <a:t>  -  Payroll: bulk delete, recalculate, USD totals</a:t>
+            </a:r>
+          </a:p>
+          <a:p>
+            <a:pPr>
+              <a:spcBef>
+                <a:spcPts val="800"/>
+              </a:spcBef>
+              <a:defRPr sz="1500" b="0">
                 <a:solidFill>
                   <a:srgbClr val="CCCCCC"/>
                 </a:solidFill>
               </a:defRPr>
             </a:pPr>
             <a:r>
-              <a:t>  -  Vercel frontend deployment</a:t>
+              <a:t>  -  Candidates: inline edit, re-analyze</a:t>
+            </a:r>
+          </a:p>
+          <a:p>
+            <a:pPr>
+              <a:spcBef>
+                <a:spcPts val="800"/>
+              </a:spcBef>
+              <a:defRPr sz="1500" b="0">
+                <a:solidFill>
+                  <a:srgbClr val="CCCCCC"/>
+                </a:solidFill>
+              </a:defRPr>
+            </a:pPr>
+            <a:r>
+              <a:t>  -  Benchmark: first version live</a:t>
+            </a:r>
+          </a:p>
+          <a:p>
+            <a:pPr>
+              <a:spcBef>
+                <a:spcPts val="800"/>
+              </a:spcBef>
+              <a:defRPr sz="1500" b="0">
+                <a:solidFill>
+                  <a:srgbClr val="CCCCCC"/>
+                </a:solidFill>
+              </a:defRPr>
+            </a:pPr>
+            <a:r>
+              <a:t>  -  56+ API endpoints, 21 DB tables</a:t>
             </a:r>
           </a:p>
         </p:txBody>
@@ -5191,52 +5321,67 @@
               </a:defRPr>
             </a:pPr>
             <a:r>
-              <a:t>Next Month</a:t>
-            </a:r>
-          </a:p>
-          <a:p>
-            <a:pPr>
-              <a:spcBef>
-                <a:spcPts val="1000"/>
-              </a:spcBef>
-              <a:defRPr sz="1600" b="0">
+              <a:t>Next</a:t>
+            </a:r>
+          </a:p>
+          <a:p>
+            <a:pPr>
+              <a:spcBef>
+                <a:spcPts val="800"/>
+              </a:spcBef>
+              <a:defRPr sz="1500" b="0">
                 <a:solidFill>
                   <a:srgbClr val="CCCCCC"/>
                 </a:solidFill>
               </a:defRPr>
             </a:pPr>
             <a:r>
-              <a:t>  -  Tax Calendar — ECI, Form C-S, AGM deadline alerts</a:t>
-            </a:r>
-          </a:p>
-          <a:p>
-            <a:pPr>
-              <a:spcBef>
-                <a:spcPts val="600"/>
-              </a:spcBef>
-              <a:defRPr sz="1600" b="0">
+              <a:t>  -  Benchmark: explore better metrics</a:t>
+            </a:r>
+          </a:p>
+          <a:p>
+            <a:pPr>
+              <a:spcBef>
+                <a:spcPts val="800"/>
+              </a:spcBef>
+              <a:defRPr sz="1500" b="0">
                 <a:solidFill>
                   <a:srgbClr val="CCCCCC"/>
                 </a:solidFill>
               </a:defRPr>
             </a:pPr>
             <a:r>
-              <a:t>  -  P&amp;L / Balance Sheet auto-generation</a:t>
-            </a:r>
-          </a:p>
-          <a:p>
-            <a:pPr>
-              <a:spcBef>
-                <a:spcPts val="600"/>
-              </a:spcBef>
-              <a:defRPr sz="1600" b="0">
+              <a:t>  -  Accounting docs upload (YA2020-2025)</a:t>
+            </a:r>
+          </a:p>
+          <a:p>
+            <a:pPr>
+              <a:spcBef>
+                <a:spcPts val="800"/>
+              </a:spcBef>
+              <a:defRPr sz="1500" b="0">
                 <a:solidFill>
                   <a:srgbClr val="CCCCCC"/>
                 </a:solidFill>
               </a:defRPr>
             </a:pPr>
             <a:r>
-              <a:t>  -  Tax Computation template</a:t>
+              <a:t>  -  Vercel frontend deployment</a:t>
+            </a:r>
+          </a:p>
+          <a:p>
+            <a:pPr>
+              <a:spcBef>
+                <a:spcPts val="800"/>
+              </a:spcBef>
+              <a:defRPr sz="1500" b="0">
+                <a:solidFill>
+                  <a:srgbClr val="CCCCCC"/>
+                </a:solidFill>
+              </a:defRPr>
+            </a:pPr>
+            <a:r>
+              <a:t>  -  Tax calendar + P&amp;L auto-generation</a:t>
             </a:r>
           </a:p>
         </p:txBody>
